--- a/deliverables/SENTINEL_Presentation.pptx
+++ b/deliverables/SENTINEL_Presentation.pptx
@@ -3352,13 +3352,57 @@
       </p:sp>
       <p:sp>
         <p:nvSpPr>
-          <p:cNvPr id="8" name="Rounded Rectangle 7"/>
+          <p:cNvPr id="8" name="TextBox 7"/>
+          <p:cNvSpPr txBox="1"/>
+          <p:nvPr/>
+        </p:nvSpPr>
+        <p:spPr>
+          <a:xfrm>
+            <a:off x="685800" y="3493008"/>
+            <a:ext cx="10789920" cy="274320"/>
+          </a:xfrm>
+          <a:prstGeom prst="rect">
+            <a:avLst/>
+          </a:prstGeom>
+          <a:noFill/>
+        </p:spPr>
+        <p:txBody>
+          <a:bodyPr wrap="square" anchor="t" lIns="0" rIns="0" tIns="0" bIns="0">
+            <a:spAutoFit/>
+          </a:bodyPr>
+          <a:lstStyle/>
+          <a:p>
+            <a:pPr algn="l"/>
+            <a:r>
+              <a:rPr sz="1250" b="1" i="0">
+                <a:solidFill>
+                  <a:srgbClr val="8FA1BC"/>
+                </a:solidFill>
+                <a:latin typeface="Arial"/>
+              </a:rPr>
+              <a:t>SUBMITTED BY:  </a:t>
+            </a:r>
+            <a:r>
+              <a:rPr sz="1250" b="0" i="0">
+                <a:solidFill>
+                  <a:srgbClr val="E6EDF7"/>
+                </a:solidFill>
+                <a:latin typeface="Arial"/>
+              </a:rPr>
+              <a:t>Divij Patel — Individual participant, Category 1  ·  vatsunp11@gmail.com</a:t>
+            </a:r>
+          </a:p>
+        </p:txBody>
+      </p:sp>
+      <p:sp>
+        <p:nvSpPr>
+          <p:cNvPr id="9" name="Rounded Rectangle 8"/>
           <p:cNvSpPr/>
           <p:nvPr/>
         </p:nvSpPr>
         <p:spPr>
           <a:xfrm>
-            <a:off x="685800" y="3657600"/>
+            <a:off x="685800" y="3877056"/>
             <a:ext cx="2286000" cy="310896"/>
           </a:xfrm>
           <a:prstGeom prst="roundRect">
@@ -3407,13 +3451,13 @@
       </p:sp>
       <p:sp>
         <p:nvSpPr>
-          <p:cNvPr id="9" name="Rounded Rectangle 8"/>
+          <p:cNvPr id="10" name="Rounded Rectangle 9"/>
           <p:cNvSpPr/>
           <p:nvPr/>
         </p:nvSpPr>
         <p:spPr>
           <a:xfrm>
-            <a:off x="3108960" y="3657600"/>
+            <a:off x="3108960" y="3877056"/>
             <a:ext cx="2651760" cy="310896"/>
           </a:xfrm>
           <a:prstGeom prst="roundRect">
@@ -3462,13 +3506,13 @@
       </p:sp>
       <p:sp>
         <p:nvSpPr>
-          <p:cNvPr id="10" name="Rounded Rectangle 9"/>
+          <p:cNvPr id="11" name="Rounded Rectangle 10"/>
           <p:cNvSpPr/>
           <p:nvPr/>
         </p:nvSpPr>
         <p:spPr>
           <a:xfrm>
-            <a:off x="5897880" y="3657600"/>
+            <a:off x="5897880" y="3877056"/>
             <a:ext cx="2651760" cy="310896"/>
           </a:xfrm>
           <a:prstGeom prst="roundRect">
@@ -3517,13 +3561,13 @@
       </p:sp>
       <p:sp>
         <p:nvSpPr>
-          <p:cNvPr id="11" name="Rounded Rectangle 10"/>
+          <p:cNvPr id="12" name="Rounded Rectangle 11"/>
           <p:cNvSpPr/>
           <p:nvPr/>
         </p:nvSpPr>
         <p:spPr>
           <a:xfrm>
-            <a:off x="8686800" y="3657600"/>
+            <a:off x="8686800" y="3877056"/>
             <a:ext cx="2194560" cy="310896"/>
           </a:xfrm>
           <a:prstGeom prst="roundRect">
@@ -3572,7 +3616,7 @@
       </p:sp>
       <p:pic>
         <p:nvPicPr>
-          <p:cNvPr id="12" name="Picture 11" descr="dashboard.png"/>
+          <p:cNvPr id="13" name="Picture 12" descr="dashboard.png"/>
           <p:cNvPicPr>
             <a:picLocks noChangeAspect="1"/>
           </p:cNvPicPr>
@@ -3586,8 +3630,8 @@
         </p:blipFill>
         <p:spPr>
           <a:xfrm>
-            <a:off x="685800" y="4315968"/>
-            <a:ext cx="3520440" cy="1920240"/>
+            <a:off x="685800" y="4407408"/>
+            <a:ext cx="3520440" cy="1828800"/>
           </a:xfrm>
           <a:prstGeom prst="rect">
             <a:avLst/>
@@ -3602,7 +3646,7 @@
       </p:pic>
       <p:sp>
         <p:nvSpPr>
-          <p:cNvPr id="13" name="TextBox 12"/>
+          <p:cNvPr id="14" name="TextBox 13"/>
           <p:cNvSpPr txBox="1"/>
           <p:nvPr/>
         </p:nvSpPr>
@@ -3637,7 +3681,7 @@
       </p:sp>
       <p:pic>
         <p:nvPicPr>
-          <p:cNvPr id="14" name="Picture 13" descr="route.png"/>
+          <p:cNvPr id="15" name="Picture 14" descr="route.png"/>
           <p:cNvPicPr>
             <a:picLocks noChangeAspect="1"/>
           </p:cNvPicPr>
@@ -3651,8 +3695,8 @@
         </p:blipFill>
         <p:spPr>
           <a:xfrm>
-            <a:off x="4462272" y="4315968"/>
-            <a:ext cx="3520440" cy="1920240"/>
+            <a:off x="4462272" y="4407408"/>
+            <a:ext cx="3520440" cy="1828800"/>
           </a:xfrm>
           <a:prstGeom prst="rect">
             <a:avLst/>
@@ -3667,7 +3711,7 @@
       </p:pic>
       <p:sp>
         <p:nvSpPr>
-          <p:cNvPr id="15" name="TextBox 14"/>
+          <p:cNvPr id="16" name="TextBox 15"/>
           <p:cNvSpPr txBox="1"/>
           <p:nvPr/>
         </p:nvSpPr>
@@ -3695,14 +3739,14 @@
                 </a:solidFill>
                 <a:latin typeface="Arial"/>
               </a:rPr>
-              <a:t>The test case: timestamped route on the GIS map</a:t>
+              <a:t>The test-case UI — shown on the simulated-journey harness (slide 4)</a:t>
             </a:r>
           </a:p>
         </p:txBody>
       </p:sp>
       <p:pic>
         <p:nvPicPr>
-          <p:cNvPr id="16" name="Picture 15" descr="health.png"/>
+          <p:cNvPr id="17" name="Picture 16" descr="health.png"/>
           <p:cNvPicPr>
             <a:picLocks noChangeAspect="1"/>
           </p:cNvPicPr>
@@ -3716,8 +3760,8 @@
         </p:blipFill>
         <p:spPr>
           <a:xfrm>
-            <a:off x="8238744" y="4315968"/>
-            <a:ext cx="3520440" cy="1920240"/>
+            <a:off x="8238744" y="4407408"/>
+            <a:ext cx="3520440" cy="1828800"/>
           </a:xfrm>
           <a:prstGeom prst="rect">
             <a:avLst/>
@@ -3732,7 +3776,7 @@
       </p:pic>
       <p:sp>
         <p:nvSpPr>
-          <p:cNvPr id="17" name="TextBox 16"/>
+          <p:cNvPr id="18" name="TextBox 17"/>
           <p:cNvSpPr txBox="1"/>
           <p:nvPr/>
         </p:nvSpPr>
@@ -3760,7 +3804,7 @@
                 </a:solidFill>
                 <a:latin typeface="Arial"/>
               </a:rPr>
-              <a:t>Per-camera health — measured fps &amp; bandwidth</a:t>
+              <a:t>Per-camera health — fps &amp; bandwidth per feed</a:t>
             </a:r>
           </a:p>
         </p:txBody>
@@ -3821,7 +3865,7 @@
                 </a:solidFill>
                 <a:latin typeface="Arial"/>
               </a:rPr>
-              <a:t>SENTINEL — Gujarat Police CCTV Hackathon 2026</a:t>
+              <a:t>SENTINEL — Divij Patel (Individual, Category 1) — Gujarat Police CCTV Hackathon 2026</a:t>
             </a:r>
           </a:p>
         </p:txBody>
@@ -4607,7 +4651,7 @@
                 </a:solidFill>
                 <a:latin typeface="Arial"/>
               </a:rPr>
-              <a:t>SENTINEL — Gujarat Police CCTV Hackathon 2026</a:t>
+              <a:t>SENTINEL — Divij Patel (Individual, Category 1) — Gujarat Police CCTV Hackathon 2026</a:t>
             </a:r>
           </a:p>
         </p:txBody>
@@ -5838,7 +5882,7 @@
                 </a:solidFill>
                 <a:latin typeface="Arial"/>
               </a:rPr>
-              <a:t>physics-filtered route across 8 cameras + retro-rejection guard</a:t>
+              <a:t>route engine w/ physics filter + retro-rejection guard (regression-tested); fuzzy recoveries proven on the real grid</a:t>
             </a:r>
           </a:p>
         </p:txBody>
@@ -6653,7 +6697,7 @@
                 </a:solidFill>
                 <a:latin typeface="Arial"/>
               </a:rPr>
-              <a:t>SENTINEL — Gujarat Police CCTV Hackathon 2026</a:t>
+              <a:t>SENTINEL — Divij Patel (Individual, Category 1) — Gujarat Police CCTV Hackathon 2026</a:t>
             </a:r>
           </a:p>
         </p:txBody>
@@ -7409,7 +7453,7 @@
                 </a:solidFill>
                 <a:latin typeface="Arial"/>
               </a:rPr>
-              <a:t>SENTINEL  ·  Hybrid Model 1 + 2/4  ·  Gujarat Police CCTV Hackathon 2026</a:t>
+              <a:t>SENTINEL  ·  Hybrid Model 1 + 2/4  ·  Divij Patel (Individual, Category 1)  ·  Gujarat Police CCTV Hackathon 2026</a:t>
             </a:r>
           </a:p>
         </p:txBody>
@@ -7470,7 +7514,7 @@
                 </a:solidFill>
                 <a:latin typeface="Arial"/>
               </a:rPr>
-              <a:t>SENTINEL — Gujarat Police CCTV Hackathon 2026</a:t>
+              <a:t>SENTINEL — Divij Patel (Individual, Category 1) — Gujarat Police CCTV Hackathon 2026</a:t>
             </a:r>
           </a:p>
         </p:txBody>
@@ -8576,7 +8620,7 @@
                 </a:solidFill>
                 <a:latin typeface="Arial"/>
               </a:rPr>
-              <a:t>SENTINEL — Gujarat Police CCTV Hackathon 2026</a:t>
+              <a:t>SENTINEL — Divij Patel (Individual, Category 1) — Gujarat Police CCTV Hackathon 2026</a:t>
             </a:r>
           </a:p>
         </p:txBody>
@@ -9601,7 +9645,7 @@
                 </a:solidFill>
                 <a:latin typeface="Arial"/>
               </a:rPr>
-              <a:t>SENTINEL — Gujarat Police CCTV Hackathon 2026</a:t>
+              <a:t>SENTINEL — Divij Patel (Individual, Category 1) — Gujarat Police CCTV Hackathon 2026</a:t>
             </a:r>
           </a:p>
         </p:txBody>
@@ -9775,7 +9819,7 @@
                 </a:solidFill>
                 <a:latin typeface="Arial"/>
               </a:rPr>
-              <a:t>Route reconstruction, live on this platform: numbered timestamped sightings, GIS polyline, distance and confidence — one click from here to the sealed dossier.</a:t>
+              <a:t>The route UI on the platform's simulated-journey demo harness (snapshots watermarked SIMULATED FEED) — the same engine serves real-grid queries: e.g. 5 timestamped sightings of CMCI801 on cam23 with 4 OCR misreads fuzzy-recovered.</a:t>
             </a:r>
           </a:p>
         </p:txBody>
@@ -10075,7 +10119,7 @@
                 </a:solidFill>
                 <a:latin typeface="Arial"/>
               </a:rPr>
-              <a:t>293 detections incl. 27 plate reads across 11 real cameras — each with a PTS-anchored UTC timestamp, snapshot and bbox, stored where GET /api/detections serves them.</a:t>
+              <a:t>293 detections on 11 real cameras, incl. 27 plate reads on 7 of them — each with a PTS-anchored UTC timestamp, snapshot and bbox, stored where GET /api/detections serves them.</a:t>
             </a:r>
           </a:p>
         </p:txBody>
@@ -10230,7 +10274,7 @@
                 </a:solidFill>
                 <a:latin typeface="Arial"/>
               </a:rPr>
-              <a:t>SENTINEL — Gujarat Police CCTV Hackathon 2026</a:t>
+              <a:t>SENTINEL — Divij Patel (Individual, Category 1) — Gujarat Police CCTV Hackathon 2026</a:t>
             </a:r>
           </a:p>
         </p:txBody>
@@ -11408,7 +11452,7 @@
                 </a:solidFill>
                 <a:latin typeface="Arial"/>
               </a:rPr>
-              <a:t>SENTINEL — Gujarat Police CCTV Hackathon 2026</a:t>
+              <a:t>SENTINEL — Divij Patel (Individual, Category 1) — Gujarat Police CCTV Hackathon 2026</a:t>
             </a:r>
           </a:p>
         </p:txBody>
@@ -11819,7 +11863,7 @@
                 </a:solidFill>
                 <a:latin typeface="Arial"/>
               </a:rPr>
-              <a:t>Each detection is matched against all active watchlist entries: exact on the normalized plate, plus fuzzy — Levenshtein distance 1 or a single OCR-confusion substitution (0↔O, 1↔I, 5↔S, 8↔B, 2↔Z) — always labelled as fuzzy.</a:t>
+              <a:t>Each detection is matched against all active watchlist entries: exact on the normalized plate, plus fuzzy via Indian-plate canonicalization + weighted edit distance over OCR-confusion pairs (0↔O, 1↔I, 5↔S, 8↔B, 6↔G, 2↔Z cost 0.25; any other edit 1.0; total ≤ 1.0 matches) — always labelled fuzzy with displayed confidence (a single confusion misread scores 0.93).</a:t>
             </a:r>
           </a:p>
         </p:txBody>
@@ -12251,7 +12295,7 @@
                 </a:solidFill>
                 <a:latin typeface="Arial"/>
               </a:rPr>
-              <a:t>SENTINEL — Gujarat Police CCTV Hackathon 2026</a:t>
+              <a:t>SENTINEL — Divij Patel (Individual, Category 1) — Gujarat Police CCTV Hackathon 2026</a:t>
             </a:r>
           </a:p>
         </p:txBody>
@@ -13703,7 +13747,7 @@
                 </a:solidFill>
                 <a:latin typeface="Arial"/>
               </a:rPr>
-              <a:t>SENTINEL — Gujarat Police CCTV Hackathon 2026</a:t>
+              <a:t>SENTINEL — Divij Patel (Individual, Category 1) — Gujarat Police CCTV Hackathon 2026</a:t>
             </a:r>
           </a:p>
         </p:txBody>
@@ -14125,7 +14169,7 @@
                 </a:solidFill>
                 <a:latin typeface="Arial"/>
               </a:rPr>
-              <a:t>Measured live, on screen: </a:t>
+              <a:t>Shown live, on screen: </a:t>
             </a:r>
             <a:r>
               <a:rPr sz="1200" b="0" i="0">
@@ -14134,7 +14178,7 @@
                 </a:solidFill>
                 <a:latin typeface="Arial"/>
               </a:rPr>
-              <a:t>the camera-health board shows both numbers for the real grid — ~2.6 Mbps per camera of video staying at the edge next to the metadata actually travelling upstream.</a:t>
+              <a:t>the camera-health board puts both numbers side by side for the real grid — per-camera video bandwidth staying at the edge next to the metadata actually travelling upstream (rows are measured in real time for every camera with a live worker attached).</a:t>
             </a:r>
           </a:p>
           <a:p>
@@ -14214,7 +14258,7 @@
                 </a:solidFill>
                 <a:latin typeface="Arial"/>
               </a:rPr>
-              <a:t>SENTINEL — Gujarat Police CCTV Hackathon 2026</a:t>
+              <a:t>SENTINEL — Divij Patel (Individual, Category 1) — Gujarat Police CCTV Hackathon 2026</a:t>
             </a:r>
           </a:p>
         </p:txBody>
@@ -14784,7 +14828,7 @@
                 </a:solidFill>
                 <a:latin typeface="Arial"/>
               </a:rPr>
-              <a:t>Measured live: 30/30 streams up.</a:t>
+              <a:t>Health board: 30/30 streams reporting.</a:t>
             </a:r>
           </a:p>
         </p:txBody>
